--- a/assets/pptx/catalog-524.pptx
+++ b/assets/pptx/catalog-524.pptx
@@ -3332,7 +3332,7 @@
                 <a:ea typeface="Ebrima"/>
                 <a:cs typeface="Ebrima"/>
               </a:rPr>
-              <a:t>ከፍ አደርገዋለሁ, ገና ሳይከፈል ባህሩ, ሳይሳካ ነገሩ (2), እስቲ ላንሳ ከበሮውን, ላመስግነው እግዚአብሔርን (2), ተመስገን ተመስገንልኝ, ተመስገንልኝ(4), በባዶ እንዳመሰግንህ</a:t>
+              <a:t>ከፍ አደርገዋለሁ, ገና ሳይከፈል ባህሩ, ሳይሳካ ነገሩ 2, እስቲ ላንሳ ከበሮውን, ላመስግነው እግዚአብሔርን 2, ተመስገን ተመስገንልኝ, ተመስገንልኝ4, በባዶ እንዳመሰግንህ</a:t>
             </a:r>
           </a:p>
         </p:txBody>
